--- a/to do.pptx
+++ b/to do.pptx
@@ -309,7 +309,7 @@
           <a:p>
             <a:fld id="{5BCAD085-E8A6-8845-BD4E-CB4CCA059FC4}" type="datetimeFigureOut">
               <a:rPr lang="en-US" smtClean="0"/>
-              <a:t>3/5/2026</a:t>
+              <a:t>3/12/2026</a:t>
             </a:fld>
             <a:endParaRPr lang="en-US"/>
           </a:p>
@@ -477,7 +477,7 @@
           <a:p>
             <a:fld id="{5BCAD085-E8A6-8845-BD4E-CB4CCA059FC4}" type="datetimeFigureOut">
               <a:rPr lang="en-US" smtClean="0"/>
-              <a:t>3/5/2026</a:t>
+              <a:t>3/12/2026</a:t>
             </a:fld>
             <a:endParaRPr lang="en-US"/>
           </a:p>
@@ -655,7 +655,7 @@
           <a:p>
             <a:fld id="{5BCAD085-E8A6-8845-BD4E-CB4CCA059FC4}" type="datetimeFigureOut">
               <a:rPr lang="en-US" smtClean="0"/>
-              <a:t>3/5/2026</a:t>
+              <a:t>3/12/2026</a:t>
             </a:fld>
             <a:endParaRPr lang="en-US"/>
           </a:p>
@@ -823,7 +823,7 @@
           <a:p>
             <a:fld id="{5BCAD085-E8A6-8845-BD4E-CB4CCA059FC4}" type="datetimeFigureOut">
               <a:rPr lang="en-US" smtClean="0"/>
-              <a:t>3/5/2026</a:t>
+              <a:t>3/12/2026</a:t>
             </a:fld>
             <a:endParaRPr lang="en-US"/>
           </a:p>
@@ -1068,7 +1068,7 @@
           <a:p>
             <a:fld id="{5BCAD085-E8A6-8845-BD4E-CB4CCA059FC4}" type="datetimeFigureOut">
               <a:rPr lang="en-US" smtClean="0"/>
-              <a:t>3/5/2026</a:t>
+              <a:t>3/12/2026</a:t>
             </a:fld>
             <a:endParaRPr lang="en-US"/>
           </a:p>
@@ -1353,7 +1353,7 @@
           <a:p>
             <a:fld id="{5BCAD085-E8A6-8845-BD4E-CB4CCA059FC4}" type="datetimeFigureOut">
               <a:rPr lang="en-US" smtClean="0"/>
-              <a:t>3/5/2026</a:t>
+              <a:t>3/12/2026</a:t>
             </a:fld>
             <a:endParaRPr lang="en-US"/>
           </a:p>
@@ -1772,7 +1772,7 @@
           <a:p>
             <a:fld id="{5BCAD085-E8A6-8845-BD4E-CB4CCA059FC4}" type="datetimeFigureOut">
               <a:rPr lang="en-US" smtClean="0"/>
-              <a:t>3/5/2026</a:t>
+              <a:t>3/12/2026</a:t>
             </a:fld>
             <a:endParaRPr lang="en-US"/>
           </a:p>
@@ -1889,7 +1889,7 @@
           <a:p>
             <a:fld id="{5BCAD085-E8A6-8845-BD4E-CB4CCA059FC4}" type="datetimeFigureOut">
               <a:rPr lang="en-US" smtClean="0"/>
-              <a:t>3/5/2026</a:t>
+              <a:t>3/12/2026</a:t>
             </a:fld>
             <a:endParaRPr lang="en-US"/>
           </a:p>
@@ -1984,7 +1984,7 @@
           <a:p>
             <a:fld id="{5BCAD085-E8A6-8845-BD4E-CB4CCA059FC4}" type="datetimeFigureOut">
               <a:rPr lang="en-US" smtClean="0"/>
-              <a:t>3/5/2026</a:t>
+              <a:t>3/12/2026</a:t>
             </a:fld>
             <a:endParaRPr lang="en-US"/>
           </a:p>
@@ -2259,7 +2259,7 @@
           <a:p>
             <a:fld id="{5BCAD085-E8A6-8845-BD4E-CB4CCA059FC4}" type="datetimeFigureOut">
               <a:rPr lang="en-US" smtClean="0"/>
-              <a:t>3/5/2026</a:t>
+              <a:t>3/12/2026</a:t>
             </a:fld>
             <a:endParaRPr lang="en-US"/>
           </a:p>
@@ -2511,7 +2511,7 @@
           <a:p>
             <a:fld id="{5BCAD085-E8A6-8845-BD4E-CB4CCA059FC4}" type="datetimeFigureOut">
               <a:rPr lang="en-US" smtClean="0"/>
-              <a:t>3/5/2026</a:t>
+              <a:t>3/12/2026</a:t>
             </a:fld>
             <a:endParaRPr lang="en-US"/>
           </a:p>
@@ -2722,7 +2722,7 @@
           <a:p>
             <a:fld id="{5BCAD085-E8A6-8845-BD4E-CB4CCA059FC4}" type="datetimeFigureOut">
               <a:rPr lang="en-US" smtClean="0"/>
-              <a:t>3/5/2026</a:t>
+              <a:t>3/12/2026</a:t>
             </a:fld>
             <a:endParaRPr lang="en-US"/>
           </a:p>
@@ -3414,8 +3414,8 @@
         </p:nvSpPr>
         <p:spPr>
           <a:xfrm>
-            <a:off x="1854201" y="4158035"/>
-            <a:ext cx="2286000" cy="646331"/>
+            <a:off x="1557867" y="4470929"/>
+            <a:ext cx="2286000" cy="369332"/>
           </a:xfrm>
           <a:prstGeom prst="rect">
             <a:avLst/>
@@ -3430,14 +3430,11 @@
           <a:p>
             <a:r>
               <a:rPr lang="hu-HU" dirty="0" err="1"/>
-              <a:t>Youtube</a:t>
-            </a:r>
-            <a:endParaRPr lang="hu-HU" dirty="0"/>
-          </a:p>
-          <a:p>
+              <a:t>Javascript</a:t>
+            </a:r>
             <a:r>
               <a:rPr lang="hu-HU" dirty="0"/>
-              <a:t>Y8</a:t>
+              <a:t> tapasztalat</a:t>
             </a:r>
           </a:p>
         </p:txBody>
@@ -3811,49 +3808,6 @@
                                   </p:childTnLst>
                                 </p:cTn>
                               </p:par>
-                              <p:par>
-                                <p:cTn id="26" presetID="14" presetClass="entr" presetSubtype="10" fill="hold" nodeType="withEffect">
-                                  <p:stCondLst>
-                                    <p:cond delay="0"/>
-                                  </p:stCondLst>
-                                  <p:childTnLst>
-                                    <p:set>
-                                      <p:cBhvr>
-                                        <p:cTn id="27" dur="1" fill="hold">
-                                          <p:stCondLst>
-                                            <p:cond delay="0"/>
-                                          </p:stCondLst>
-                                        </p:cTn>
-                                        <p:tgtEl>
-                                          <p:spTgt spid="8">
-                                            <p:txEl>
-                                              <p:pRg st="1" end="1"/>
-                                            </p:txEl>
-                                          </p:spTgt>
-                                        </p:tgtEl>
-                                        <p:attrNameLst>
-                                          <p:attrName>style.visibility</p:attrName>
-                                        </p:attrNameLst>
-                                      </p:cBhvr>
-                                      <p:to>
-                                        <p:strVal val="visible"/>
-                                      </p:to>
-                                    </p:set>
-                                    <p:animEffect transition="in" filter="randombar(horizontal)">
-                                      <p:cBhvr>
-                                        <p:cTn id="28" dur="500"/>
-                                        <p:tgtEl>
-                                          <p:spTgt spid="8">
-                                            <p:txEl>
-                                              <p:pRg st="1" end="1"/>
-                                            </p:txEl>
-                                          </p:spTgt>
-                                        </p:tgtEl>
-                                      </p:cBhvr>
-                                    </p:animEffect>
-                                  </p:childTnLst>
-                                </p:cTn>
-                              </p:par>
                             </p:childTnLst>
                           </p:cTn>
                         </p:par>
@@ -3861,26 +3815,26 @@
                     </p:cTn>
                   </p:par>
                   <p:par>
-                    <p:cTn id="29" fill="hold">
+                    <p:cTn id="26" fill="hold">
                       <p:stCondLst>
                         <p:cond delay="indefinite"/>
                       </p:stCondLst>
                       <p:childTnLst>
                         <p:par>
-                          <p:cTn id="30" fill="hold">
+                          <p:cTn id="27" fill="hold">
                             <p:stCondLst>
                               <p:cond delay="0"/>
                             </p:stCondLst>
                             <p:childTnLst>
                               <p:par>
-                                <p:cTn id="31" presetID="10" presetClass="entr" presetSubtype="0" fill="hold" nodeType="clickEffect">
+                                <p:cTn id="28" presetID="10" presetClass="entr" presetSubtype="0" fill="hold" nodeType="clickEffect">
                                   <p:stCondLst>
                                     <p:cond delay="0"/>
                                   </p:stCondLst>
                                   <p:childTnLst>
                                     <p:set>
                                       <p:cBhvr>
-                                        <p:cTn id="32" dur="1" fill="hold">
+                                        <p:cTn id="29" dur="1" fill="hold">
                                           <p:stCondLst>
                                             <p:cond delay="0"/>
                                           </p:stCondLst>
@@ -3902,7 +3856,7 @@
                                     </p:set>
                                     <p:animEffect transition="in" filter="fade">
                                       <p:cBhvr>
-                                        <p:cTn id="33" dur="500"/>
+                                        <p:cTn id="30" dur="500"/>
                                         <p:tgtEl>
                                           <p:spTgt spid="7">
                                             <p:txEl>
